--- a/산출물/실전반/이론_오프라인/07회차/실전반_오프라인_07회차.pptx
+++ b/산출물/실전반/이론_오프라인/07회차/실전반_오프라인_07회차.pptx
@@ -554,11 +554,6 @@
           </a:p>
           <a:p>
             <a:r>
-              <a:t>· 이론은 온라인 교재의 장에서 오늘 실습에 쓰는 것만</a:t>
-            </a:r>
-          </a:p>
-          <a:p>
-            <a:r>
               <a:t>[다음] 학습목표</a:t>
             </a:r>
           </a:p>
@@ -849,7 +844,7 @@
           </a:p>
           <a:p>
             <a:r>
-              <a:t>· 실습에서 bpmn.io로 기본 승인 흐름을 그리고 설비 대응으로 넓힌다</a:t>
+              <a:t>· 도형의 자리 → 경보가 처리 건을 여는 모습 → 작업마다 붙는 실행 기능 → 선 이름과 연결 값 → 기본 흐름이 빠진 갈림</a:t>
             </a:r>
           </a:p>
           <a:p>
@@ -1159,11 +1154,6 @@
           </a:p>
           <a:p>
             <a:r>
-              <a:t>· 실습에서 내 작업마다 대응 실행 기능을 표시하는 일이 이것</a:t>
-            </a:r>
-          </a:p>
-          <a:p>
-            <a:r>
               <a:t>[다음] 선 이름과 갈림 조건</a:t>
             </a:r>
           </a:p>
@@ -1449,7 +1439,7 @@
           </a:p>
           <a:p>
             <a:r>
-              <a:t>· 실습에서 승인 · 거절 경로를 잇고 승인 작업을 취소하지 않는 지연 알림을 더한다</a:t>
+              <a:t>· 풀 · 레인 · 메시지 흐름 → 경계 타이머 두 가지 → 승인 작업의 타이머와 역할 → 실행 정의로 가져올 때 걸리는 그림 → 결정을 넘기라는 요구</a:t>
             </a:r>
           </a:p>
           <a:p>
@@ -1554,7 +1544,7 @@
           </a:p>
           <a:p>
             <a:r>
-              <a:t>· 긴급 대응 · 실습은 풀 하나에 레인으로</a:t>
+              <a:t>· 긴급 대응은 풀 하나에 레인으로</a:t>
             </a:r>
           </a:p>
           <a:p>
@@ -1959,7 +1949,7 @@
           </a:p>
           <a:p>
             <a:r>
-              <a:t>· 실습 그림 검사의 점검표, 학생은 포털에 그림을 직접 등록하지 않는다</a:t>
+              <a:t>· 그림을 실행 정의로 가져오기 전에 보는 점검표</a:t>
             </a:r>
           </a:p>
           <a:p>
@@ -2149,7 +2139,7 @@
           </a:p>
           <a:p>
             <a:r>
-              <a:t>· 실습에서 내 그림의 작업마다 대응하는 실행 기능을 표시한다</a:t>
+              <a:t>· 엔진 · 정의 · 처리 건 → 작업 종류별로 기다리는 것 → 토큰과 프로세스 변수 → 누구 차례인지 → COMPLETED가 같은 두 처리 건 → 승인 권한을 지키는 검사</a:t>
             </a:r>
           </a:p>
           <a:p>
@@ -3634,7 +3624,7 @@
           </a:p>
           <a:p>
             <a:r>
-              <a:t>· 내 그림을 포털에 등록된 기준 흐름 · 제공 매핑과 견주어 작업마다 실행 기능을 표시하고 그림 파일과 실행 정의를 가른다 — 진행은 핸즈온 가이드</a:t>
+              <a:t>· 내 그림은 포털에 직접 등록하지 않고 등록된 기준 흐름 · 제공 매핑과 견주어 작업마다 실행 기능을 표시하고 그림 파일과 실행 정의를 가른다 — 진행은 핸즈온 가이드</a:t>
             </a:r>
           </a:p>
           <a:p>
@@ -8572,7 +8562,7 @@
       </p:sp>
       <p:pic>
         <p:nvPicPr>
-          <p:cNvPr id="6" name="Picture 5" descr="illust_4167768782510048169_1793113376.png"/>
+          <p:cNvPr id="6" name="Picture 5" descr="illust_4181059124279213481_1793113376.png"/>
           <p:cNvPicPr>
             <a:picLocks noChangeAspect="1"/>
           </p:cNvPicPr>
